--- a/_implementation-notes/evening-series/FotH Evening Session 3-4 Combined Slides DRAFT v1.pptx
+++ b/_implementation-notes/evening-series/FotH Evening Session 3-4 Combined Slides DRAFT v1.pptx
@@ -7467,7 +7467,7 @@
           <p:nvPr/>
         </p:nvPicPr>
         <p:blipFill>
-          <a:blip r:embed="rId5"/>
+          <a:blip r:embed="rId6"/>
           <a:stretch>
             <a:fillRect/>
           </a:stretch>

--- a/_implementation-notes/evening-series/FotH Evening Session 3-4 Combined Slides DRAFT v1.pptx
+++ b/_implementation-notes/evening-series/FotH Evening Session 3-4 Combined Slides DRAFT v1.pptx
@@ -1075,7 +1075,7 @@
           </a:p>
           <a:p>
             <a:r>
-              <a:t>CUES: Telling order arranged beforehand. Any parent whose story carries news their teen has not been handed talked with the Lead Companion first — hold that plan.</a:t>
+              <a:t>CUES: Telling order arranged beforehand — Companion-first stays available as a depth-setting lever when the circle needs it. Any parent whose story carries news their teen has not been handed talked with the Lead Companion first — hold that plan.</a:t>
             </a:r>
           </a:p>
         </p:txBody>

--- a/_implementation-notes/evening-series/FotH Evening Session 3-4 Combined Slides DRAFT v1.pptx
+++ b/_implementation-notes/evening-series/FotH Evening Session 3-4 Combined Slides DRAFT v1.pptx
@@ -1788,6 +1788,11 @@
               <a:t>CUES: Do not pack up — adults stay accessible ten minutes after. Find any senior who led before they leave: one sentence of thanks, and 'How are you, after that?'</a:t>
             </a:r>
           </a:p>
+          <a:p>
+            <a:r>
+              <a:t>BLESSINGS: eyes on the person, not the screen — nothing to read; say what is on your heart for them, specific and short.</a:t>
+            </a:r>
+          </a:p>
         </p:txBody>
       </p:sp>
     </p:spTree>
@@ -6878,7 +6883,7 @@
                 </a:solidFill>
                 <a:latin typeface="Calibri"/>
               </a:rPr>
-              <a:t>Blessings — specific, witnessed, short</a:t>
+              <a:t>Blessings — eyes on the person, not the screen: say what is on your heart for them. Specific, witnessed, short</a:t>
             </a:r>
           </a:p>
           <a:p>

--- a/_implementation-notes/evening-series/FotH Evening Session 3-4 Combined Slides DRAFT v1.pptx
+++ b/_implementation-notes/evening-series/FotH Evening Session 3-4 Combined Slides DRAFT v1.pptx
@@ -786,7 +786,7 @@
           <a:lstStyle/>
           <a:p>
             <a:r>
-              <a:t>S3–4 COMBINED · WELCOME · LEAD: CONTAINER HOLDER · GROUNDING — every session opens on this map</a:t>
+              <a:t>E3 · WELCOME · LEAD: CONTAINER HOLDER · GROUNDING — every session opens on this map</a:t>
             </a:r>
           </a:p>
           <a:p>
@@ -796,7 +796,7 @@
           </a:p>
           <a:p>
             <a:r>
-              <a:t>1. Locate tonight on the map, plainly: Session 3–4 combined crosses from the first box toward the second — Self opening toward Others — and everyone tells tonight, teen-led.</a:t>
+              <a:t>1. Locate tonight on the map, plainly: Evening 3 crosses from the first box toward the second — Self opening toward Others — and everyone tells tonight, teen-led.</a:t>
             </a:r>
           </a:p>
           <a:p>
@@ -857,7 +857,7 @@
           <a:lstStyle/>
           <a:p>
             <a:r>
-              <a:t>S3 · COMMISSIONING · LEAD: CONTENT PRESENTER</a:t>
+              <a:t>E3 · COMMISSIONING · LEAD: CONTENT PRESENTER</a:t>
             </a:r>
           </a:p>
           <a:p>
@@ -928,7 +928,7 @@
           <a:lstStyle/>
           <a:p>
             <a:r>
-              <a:t>S3 · COMMISSIONING · LEAD: CONTENT PRESENTER</a:t>
+              <a:t>E3 · COMMISSIONING · LEAD: CONTENT PRESENTER</a:t>
             </a:r>
           </a:p>
           <a:p>
@@ -994,7 +994,7 @@
           <a:lstStyle/>
           <a:p>
             <a:r>
-              <a:t>S3–4 COMBINED · pre-session · DIVIDER</a:t>
+              <a:t>E3 · pre-session · DIVIDER</a:t>
             </a:r>
           </a:p>
           <a:p>
@@ -1045,7 +1045,7 @@
           <a:lstStyle/>
           <a:p>
             <a:r>
-              <a:t>S3–4 COMBINED · 7:00–8:30 · LEAD: BOTH LEADERS</a:t>
+              <a:t>E3 · 7:00–8:30 · LEAD: BOTH LEADERS</a:t>
             </a:r>
           </a:p>
           <a:p>
@@ -1121,7 +1121,7 @@
           <a:lstStyle/>
           <a:p>
             <a:r>
-              <a:t>S3–4 COMBINED · 7:00–7:06 · LEAD: CONTAINER HOLDER</a:t>
+              <a:t>E3 · 7:00–7:06 · LEAD: CONTAINER HOLDER</a:t>
             </a:r>
           </a:p>
           <a:p>
@@ -1197,7 +1197,7 @@
           <a:lstStyle/>
           <a:p>
             <a:r>
-              <a:t>S3–4 COMBINED · 7:06–7:12 · LEAD: CONTAINER HOLDER</a:t>
+              <a:t>E3 · 7:06–7:12 · LEAD: CONTAINER HOLDER</a:t>
             </a:r>
           </a:p>
           <a:p>
@@ -1263,7 +1263,7 @@
           <a:lstStyle/>
           <a:p>
             <a:r>
-              <a:t>S3–4 COMBINED · 7:12–7:20 · LEAD: CONTENT PRESENTER</a:t>
+              <a:t>E3 · 7:12–7:20 · LEAD: CONTENT PRESENTER</a:t>
             </a:r>
           </a:p>
           <a:p>
@@ -1339,7 +1339,7 @@
           <a:lstStyle/>
           <a:p>
             <a:r>
-              <a:t>S3–4 COMBINED · 7:20–7:23 · LEAD: CONTENT PRESENTER</a:t>
+              <a:t>E3 · 7:20–7:23 · LEAD: CONTENT PRESENTER</a:t>
             </a:r>
           </a:p>
           <a:p>
@@ -1410,7 +1410,7 @@
           <a:lstStyle/>
           <a:p>
             <a:r>
-              <a:t>S3–4 COMBINED · 7:23–7:25 · LEAD: CONTENT PRESENTER · TRANSITION</a:t>
+              <a:t>E3 · 7:23–7:25 · LEAD: CONTENT PRESENTER · TRANSITION</a:t>
             </a:r>
           </a:p>
           <a:p>
@@ -1481,7 +1481,7 @@
           <a:lstStyle/>
           <a:p>
             <a:r>
-              <a:t>S3–4 COMBINED · 7:25–8:13 · LEAD: CONTENT PRESENTER · ONE CIRCLE</a:t>
+              <a:t>E3 · 7:25–8:13 · LEAD: CONTENT PRESENTER · ONE CIRCLE</a:t>
             </a:r>
           </a:p>
           <a:p>
@@ -1557,7 +1557,7 @@
           <a:lstStyle/>
           <a:p>
             <a:r>
-              <a:t>S3–4 COMBINED · 8:13–8:18 · LEAD: CONTAINER HOLDER</a:t>
+              <a:t>E3 · 8:13–8:18 · LEAD: CONTAINER HOLDER</a:t>
             </a:r>
           </a:p>
           <a:p>
@@ -1628,7 +1628,7 @@
           <a:lstStyle/>
           <a:p>
             <a:r>
-              <a:t>S3–4 COMBINED · 8:18–8:22 · LEAD: CONTENT PRESENTER</a:t>
+              <a:t>E3 · 8:18–8:22 · LEAD: CONTENT PRESENTER</a:t>
             </a:r>
           </a:p>
           <a:p>
@@ -1638,7 +1638,7 @@
           </a:p>
           <a:p>
             <a:r>
-              <a:t>1. Parent Co-Companion leads. One handout per family (H3.5 — the Session 3 sheet).</a:t>
+              <a:t>1. Parent Co-Companion leads. One handout per family (H3.5 — the Evening 3 sheet).</a:t>
             </a:r>
           </a:p>
           <a:p>
@@ -1694,7 +1694,7 @@
           <a:lstStyle/>
           <a:p>
             <a:r>
-              <a:t>S3–4 COMBINED · 8:22–8:26 · LEAD: BOTH LEADERS</a:t>
+              <a:t>E3 · 8:22–8:26 · LEAD: BOTH LEADERS</a:t>
             </a:r>
           </a:p>
           <a:p>
@@ -1760,7 +1760,7 @@
           <a:lstStyle/>
           <a:p>
             <a:r>
-              <a:t>S3–4 COMBINED · 8:26–8:30 · LEAD: CONTAINER HOLDER</a:t>
+              <a:t>E3 · 8:26–8:30 · LEAD: CONTAINER HOLDER</a:t>
             </a:r>
           </a:p>
           <a:p>
@@ -7173,7 +7173,7 @@
                 </a:solidFill>
                 <a:latin typeface="Calibri"/>
               </a:rPr>
-              <a:t>SESSION 3–4</a:t>
+              <a:t>EVENING 3</a:t>
             </a:r>
           </a:p>
           <a:p>
@@ -7407,7 +7407,7 @@
                 </a:solidFill>
                 <a:latin typeface="Calibri"/>
               </a:rPr>
-              <a:t>Session 3–4 combined crosses from the first box toward the second — </a:t>
+              <a:t>Evening 3 crosses from the first box toward the second — </a:t>
             </a:r>
             <a:r>
               <a:rPr sz="1800" b="1">
@@ -7591,7 +7591,7 @@
                 </a:solidFill>
                 <a:latin typeface="Cambria"/>
               </a:rPr>
-              <a:t>Session 3–4 — Tonight’s Road</a:t>
+              <a:t>Evening 3 — Tonight’s Road</a:t>
             </a:r>
           </a:p>
         </p:txBody>
@@ -8348,7 +8348,7 @@
                 </a:solidFill>
                 <a:latin typeface="Cambria"/>
               </a:rPr>
-              <a:t>Week 2 Check-In — Heart Soil</a:t>
+              <a:t>Evening 2 Check-In — Heart Soil</a:t>
             </a:r>
           </a:p>
         </p:txBody>
